--- a/artifacts/slides/computer-use.pptx
+++ b/artifacts/slides/computer-use.pptx
@@ -506,7 +506,7 @@
               <a:t>Computer Use: what it does, where value comes from, and the bounded control story.,Exact lifecycle: public-preview. Public preview in local Copilot CLI and Copilot app sessions on Windows and macOS.,Verification date: 2026-10-14. Evidence older than 30 days requires re-review.,This is independent enablement for a controlled pilot, not production certification or customer-specific approval.,Cost detail: Enterprise Copilot CLI model interactions consume AI credits. The reviewed computer-use documentation does not quote a separate computer-use tariff. Check the actual tenant and model usage before quoting a demo cost.,Explicit assumptions:
 Existing approved Copilot seat.
 Synthetic local document; no paid external application transaction.
-AI credits are usage-based; one enterprise AI credit equals USD 0.01.,Complete assessment: https://github.com/hammadorg93/copilot-runway/blob/main/features/computer-use/assessment.md,Presenter runbook: https://github.com/hammadorg93/copilot-runway/blob/main/demos/computer-use/README.md,Kit validation: kit-tested. Live feature validation: not-run.,Remote cleanup: Disable /computer; review any saved app approvals separately. A local reset cannot revoke permissions in an active session.,Primary sources:
+AI credits are usage-based; one enterprise AI credit equals USD 0.01.,Complete assessment: https://github.com/aj-enns/copilot-runway/blob/main/features/computer-use/assessment.md,Presenter runbook: https://github.com/aj-enns/copilot-runway/blob/main/demos/computer-use/README.md,Kit validation: kit-tested. Live feature validation: not-run.,Remote cleanup: Disable /computer; review any saved app approvals separately. A local reset cannot revoke permissions in an active session.,Primary sources:
 About computer use in GitHub Copilot: https://docs.github.com/en/copilot/concepts/agents/computer-use
 Usage-based billing for organizations and enterprises: https://docs.github.com/en/copilot/concepts/billing-and-usage/organizations-and-enterprises/billing
 GitHub Copilot licenses: https://docs.github.com/en/billing/concepts/product-billing/github-copilot-licenses
@@ -603,7 +603,7 @@
               <a:t>Computer Use: pilot decision, evidence gaps, cost assumptions, and how to start the repeatable demo kit.,Exact lifecycle: public-preview. Public preview in local Copilot CLI and Copilot app sessions on Windows and macOS.,Verification date: 2026-10-14. Evidence older than 30 days requires re-review.,This is independent enablement for a controlled pilot, not production certification or customer-specific approval.,Cost detail: Enterprise Copilot CLI model interactions consume AI credits. The reviewed computer-use documentation does not quote a separate computer-use tariff. Check the actual tenant and model usage before quoting a demo cost.,Explicit assumptions:
 Existing approved Copilot seat.
 Synthetic local document; no paid external application transaction.
-AI credits are usage-based; one enterprise AI credit equals USD 0.01.,Complete assessment: https://github.com/hammadorg93/copilot-runway/blob/main/features/computer-use/assessment.md,Presenter runbook: https://github.com/hammadorg93/copilot-runway/blob/main/demos/computer-use/README.md,Kit validation: kit-tested. Live feature validation: not-run.,Remote cleanup: Disable /computer; review any saved app approvals separately. A local reset cannot revoke permissions in an active session.,Primary sources:
+AI credits are usage-based; one enterprise AI credit equals USD 0.01.,Complete assessment: https://github.com/aj-enns/copilot-runway/blob/main/features/computer-use/assessment.md,Presenter runbook: https://github.com/aj-enns/copilot-runway/blob/main/demos/computer-use/README.md,Kit validation: kit-tested. Live feature validation: not-run.,Remote cleanup: Disable /computer; review any saved app approvals separately. A local reset cannot revoke permissions in an active session.,Primary sources:
 About computer use in GitHub Copilot: https://docs.github.com/en/copilot/concepts/agents/computer-use
 Usage-based billing for organizations and enterprises: https://docs.github.com/en/copilot/concepts/billing-and-usage/organizations-and-enterprises/billing
 GitHub Copilot licenses: https://docs.github.com/en/billing/concepts/product-billing/github-copilot-licenses

--- a/artifacts/slides/computer-use.pptx
+++ b/artifacts/slides/computer-use.pptx
@@ -2322,13 +2322,13 @@
             <a:r>
               <a:rPr lang="en-US" sz="3000" b="1" dirty="0">
                 <a:solidFill>
-                  <a:srgbClr val="B11F4B"/>
-                </a:solidFill>
-                <a:latin typeface="Aptos" pitchFamily="34" charset="0"/>
-                <a:ea typeface="Aptos" pitchFamily="34" charset="-122"/>
-                <a:cs typeface="Aptos" pitchFamily="34" charset="-120"/>
-              </a:rPr>
-              <a:t>Pilot with conditions</a:t>
+                  <a:srgbClr val="B91C1C"/>
+                </a:solidFill>
+                <a:latin typeface="Aptos" pitchFamily="34" charset="0"/>
+                <a:ea typeface="Aptos" pitchFamily="34" charset="-122"/>
+                <a:cs typeface="Aptos" pitchFamily="34" charset="-120"/>
+              </a:rPr>
+              <a:t>Hold for evidence</a:t>
             </a:r>
             <a:endParaRPr lang="en-US" sz="3000" dirty="0"/>
           </a:p>
